--- a/site/clases/parte-3-estadistica-inferencial/185-a-b-testing-tamano-de-muestra-poder-estadistico/clase-185-a-b-testing-tamano-de-muestra-poder-estadistico-presentacion.pptx
+++ b/site/clases/parte-3-estadistica-inferencial/185-a-b-testing-tamano-de-muestra-poder-estadistico/clase-185-a-b-testing-tamano-de-muestra-poder-estadistico-presentacion.pptx
@@ -3272,7 +3272,7 @@
                 </a:solidFill>
                 <a:latin typeface="Segoe UI"/>
               </a:rPr>
-              <a:t>Parte: 3 — Estadística Inferencial y Causal · Fuente: Bruce &amp; Bruce, cap. 3 A/B Testing + Kohavi, Tang &amp; Xu, Trustworthy Online Controlled Experiments (2020).  Duración estimada: 90 min.</a:t>
+              <a:t>Parte: 3 — Estadística Inferencial y Causal · Fuente: Bruce &amp; Bruce, cap. 3 A/B Testing + Kohavi, Tang &amp; Xu, Trustworthy Online Controlled Experiments (2020).  Duración estimada: 90 min. · Nivel: Intermedio-Avanzado</a:t>
             </a:r>
           </a:p>
         </p:txBody>
@@ -3581,7 +3581,7 @@
                 </a:solidFill>
                 <a:latin typeface="Segoe UI"/>
               </a:rPr>
-              <a:t>Parte: 3 — Estadística Inferencial y Causal · Fuente: Bruce &amp; Bruce, cap. 3 A/B Testing + Kohavi, Tang &amp; Xu, Trustworthy Online Controlled Experiments (2020).  Duración estimada: 90 min.</a:t>
+              <a:t>Parte: 3 — Estadística Inferencial y Causal · Fuente: Bruce &amp; Bruce, cap. 3 A/B Testing + Kohavi, Tang &amp; Xu, Trustworthy Online Controlled Experiments (2020).  Duración estimada: 90 min. · Nivel: Intermedio-Avanzado</a:t>
             </a:r>
           </a:p>
         </p:txBody>
@@ -4845,7 +4845,7 @@
                 </a:solidFill>
                 <a:latin typeface="Segoe UI"/>
               </a:rPr>
-              <a:t>Primer bloque ejecutable del notebook.</a:t>
+              <a:t>n depende de α, poder (1-β) y del effect size. Para proporciones usamos Cohen's h y NormalIndPower.</a:t>
             </a:r>
           </a:p>
         </p:txBody>
@@ -4932,7 +4932,254 @@
                 </a:solidFill>
                 <a:latin typeface="Courier New"/>
               </a:rPr>
-              <a:t># Imports y configuración inicial</a:t>
+              <a:t>import numpy as np</a:t>
+            </a:r>
+          </a:p>
+          <a:p>
+            <a:pPr>
+              <a:defRPr sz="1200" b="0">
+                <a:solidFill>
+                  <a:srgbClr val="F8FAFC"/>
+                </a:solidFill>
+                <a:latin typeface="Courier New"/>
+              </a:defRPr>
+            </a:pPr>
+            <a:r>
+              <a:rPr sz="1200" b="0">
+                <a:solidFill>
+                  <a:srgbClr val="F8FAFC"/>
+                </a:solidFill>
+                <a:latin typeface="Courier New"/>
+              </a:rPr>
+              <a:t>from scipy import stats</a:t>
+            </a:r>
+          </a:p>
+          <a:p>
+            <a:pPr>
+              <a:defRPr sz="1200" b="0">
+                <a:solidFill>
+                  <a:srgbClr val="F8FAFC"/>
+                </a:solidFill>
+                <a:latin typeface="Courier New"/>
+              </a:defRPr>
+            </a:pPr>
+            <a:r>
+              <a:rPr sz="1200" b="0">
+                <a:solidFill>
+                  <a:srgbClr val="F8FAFC"/>
+                </a:solidFill>
+                <a:latin typeface="Courier New"/>
+              </a:rPr>
+              <a:t>from statsmodels.stats.power import NormalIndPower</a:t>
+            </a:r>
+          </a:p>
+          <a:p>
+            <a:pPr>
+              <a:defRPr sz="1200" b="0">
+                <a:solidFill>
+                  <a:srgbClr val="F8FAFC"/>
+                </a:solidFill>
+                <a:latin typeface="Courier New"/>
+              </a:defRPr>
+            </a:pPr>
+            <a:r>
+              <a:rPr sz="1200" b="0">
+                <a:solidFill>
+                  <a:srgbClr val="F8FAFC"/>
+                </a:solidFill>
+                <a:latin typeface="Courier New"/>
+              </a:rPr>
+              <a:t>from statsmodels.stats.proportion import proportion_effectsize, proportions_ztest, confint_proportions_2indep</a:t>
+            </a:r>
+          </a:p>
+          <a:p>
+            <a:pPr>
+              <a:defRPr sz="1200" b="0">
+                <a:solidFill>
+                  <a:srgbClr val="F8FAFC"/>
+                </a:solidFill>
+                <a:latin typeface="Courier New"/>
+              </a:defRPr>
+            </a:pPr>
+            <a:r>
+              <a:rPr sz="1200" b="0">
+                <a:solidFill>
+                  <a:srgbClr val="F8FAFC"/>
+                </a:solidFill>
+                <a:latin typeface="Courier New"/>
+              </a:rPr>
+              <a:t>import matplotlib.pyplot as plt</a:t>
+            </a:r>
+          </a:p>
+          <a:p>
+            <a:pPr>
+              <a:defRPr sz="1200" b="0">
+                <a:solidFill>
+                  <a:srgbClr val="F8FAFC"/>
+                </a:solidFill>
+                <a:latin typeface="Courier New"/>
+              </a:defRPr>
+            </a:pPr>
+            <a:r>
+              <a:rPr sz="1200" b="0">
+                <a:solidFill>
+                  <a:srgbClr val="F8FAFC"/>
+                </a:solidFill>
+                <a:latin typeface="Courier New"/>
+              </a:rPr>
+              <a:t> </a:t>
+            </a:r>
+          </a:p>
+          <a:p>
+            <a:pPr>
+              <a:defRPr sz="1200" b="0">
+                <a:solidFill>
+                  <a:srgbClr val="F8FAFC"/>
+                </a:solidFill>
+                <a:latin typeface="Courier New"/>
+              </a:defRPr>
+            </a:pPr>
+            <a:r>
+              <a:rPr sz="1200" b="0">
+                <a:solidFill>
+                  <a:srgbClr val="F8FAFC"/>
+                </a:solidFill>
+                <a:latin typeface="Courier New"/>
+              </a:rPr>
+              <a:t>rng = np.random.default_rng(42)</a:t>
+            </a:r>
+          </a:p>
+          <a:p>
+            <a:pPr>
+              <a:defRPr sz="1200" b="0">
+                <a:solidFill>
+                  <a:srgbClr val="F8FAFC"/>
+                </a:solidFill>
+                <a:latin typeface="Courier New"/>
+              </a:defRPr>
+            </a:pPr>
+            <a:r>
+              <a:rPr sz="1200" b="0">
+                <a:solidFill>
+                  <a:srgbClr val="F8FAFC"/>
+                </a:solidFill>
+                <a:latin typeface="Courier New"/>
+              </a:rPr>
+              <a:t> </a:t>
+            </a:r>
+          </a:p>
+          <a:p>
+            <a:pPr>
+              <a:defRPr sz="1200" b="0">
+                <a:solidFill>
+                  <a:srgbClr val="F8FAFC"/>
+                </a:solidFill>
+                <a:latin typeface="Courier New"/>
+              </a:defRPr>
+            </a:pPr>
+            <a:r>
+              <a:rPr sz="1200" b="0">
+                <a:solidFill>
+                  <a:srgbClr val="F8FAFC"/>
+                </a:solidFill>
+                <a:latin typeface="Courier New"/>
+              </a:rPr>
+              <a:t>p0, p1 = 0.10, 0.11</a:t>
+            </a:r>
+          </a:p>
+          <a:p>
+            <a:pPr>
+              <a:defRPr sz="1200" b="0">
+                <a:solidFill>
+                  <a:srgbClr val="F8FAFC"/>
+                </a:solidFill>
+                <a:latin typeface="Courier New"/>
+              </a:defRPr>
+            </a:pPr>
+            <a:r>
+              <a:rPr sz="1200" b="0">
+                <a:solidFill>
+                  <a:srgbClr val="F8FAFC"/>
+                </a:solidFill>
+                <a:latin typeface="Courier New"/>
+              </a:rPr>
+              <a:t>h = proportion_effectsize(p1, p0)   # Cohen's h</a:t>
+            </a:r>
+          </a:p>
+          <a:p>
+            <a:pPr>
+              <a:defRPr sz="1200" b="0">
+                <a:solidFill>
+                  <a:srgbClr val="F8FAFC"/>
+                </a:solidFill>
+                <a:latin typeface="Courier New"/>
+              </a:defRPr>
+            </a:pPr>
+            <a:r>
+              <a:rPr sz="1200" b="0">
+                <a:solidFill>
+                  <a:srgbClr val="F8FAFC"/>
+                </a:solidFill>
+                <a:latin typeface="Courier New"/>
+              </a:rPr>
+              <a:t>n_req = NormalIndPower().solve_power(effect_size=h, alpha=0.05, power=0.8, alternative="two-sided")</a:t>
+            </a:r>
+          </a:p>
+          <a:p>
+            <a:pPr>
+              <a:defRPr sz="1200" b="0">
+                <a:solidFill>
+                  <a:srgbClr val="F8FAFC"/>
+                </a:solidFill>
+                <a:latin typeface="Courier New"/>
+              </a:defRPr>
+            </a:pPr>
+            <a:r>
+              <a:rPr sz="1200" b="0">
+                <a:solidFill>
+                  <a:srgbClr val="F8FAFC"/>
+                </a:solidFill>
+                <a:latin typeface="Courier New"/>
+              </a:rPr>
+              <a:t>print(f"Cohen's h = {h:.4f}")</a:t>
+            </a:r>
+          </a:p>
+          <a:p>
+            <a:pPr>
+              <a:defRPr sz="1200" b="0">
+                <a:solidFill>
+                  <a:srgbClr val="F8FAFC"/>
+                </a:solidFill>
+                <a:latin typeface="Courier New"/>
+              </a:defRPr>
+            </a:pPr>
+            <a:r>
+              <a:rPr sz="1200" b="0">
+                <a:solidFill>
+                  <a:srgbClr val="F8FAFC"/>
+                </a:solidFill>
+                <a:latin typeface="Courier New"/>
+              </a:rPr>
+              <a:t>print(f"n por grupo para detectar 10%→11% (poder 0.8, α=0.05) = {np.ceil(n_req):.0f}")</a:t>
+            </a:r>
+          </a:p>
+          <a:p>
+            <a:pPr>
+              <a:defRPr sz="1200" b="0">
+                <a:solidFill>
+                  <a:srgbClr val="F8FAFC"/>
+                </a:solidFill>
+                <a:latin typeface="Courier New"/>
+              </a:defRPr>
+            </a:pPr>
+            <a:r>
+              <a:rPr sz="1200" b="0">
+                <a:solidFill>
+                  <a:srgbClr val="F8FAFC"/>
+                </a:solidFill>
+                <a:latin typeface="Courier New"/>
+              </a:rPr>
+              <a:t>assert n_req &gt; 5000</a:t>
             </a:r>
           </a:p>
         </p:txBody>
